--- a/data/employees/EMP031/AST-EMP031-01.pptx
+++ b/data/employees/EMP031/AST-EMP031-01.pptx
@@ -9,6 +9,7 @@
     <p:sldId id="257" r:id="rId8"/>
     <p:sldId id="258" r:id="rId9"/>
     <p:sldId id="259" r:id="rId10"/>
+    <p:sldId id="260" r:id="rId11"/>
   </p:sldIdLst>
   <p:sldSz cx="9144000" cy="6858000" type="screen4x3"/>
   <p:notesSz cx="6858000" cy="9144000"/>
@@ -3098,42 +3099,55 @@
             <a:spLocks noGrp="1"/>
           </p:cNvSpPr>
           <p:nvPr>
-            <p:ph type="ctrTitle"/>
-          </p:nvPr>
-        </p:nvSpPr>
-        <p:spPr/>
-        <p:txBody>
-          <a:bodyPr/>
-          <a:lstStyle/>
-          <a:p>
-            <a:r>
-              <a:t>Project update deck - EMP031</a:t>
-            </a:r>
-          </a:p>
-        </p:txBody>
-      </p:sp>
-      <p:sp>
-        <p:nvSpPr>
-          <p:cNvPr id="3" name="Subtitle 2"/>
-          <p:cNvSpPr>
-            <a:spLocks noGrp="1"/>
-          </p:cNvSpPr>
-          <p:nvPr>
-            <p:ph type="subTitle" idx="1"/>
-          </p:nvPr>
-        </p:nvSpPr>
-        <p:spPr/>
-        <p:txBody>
-          <a:bodyPr/>
-          <a:lstStyle/>
-          <a:p>
-            <a:r>
-              <a:t>Alex Garcia | Director | R&amp;D</a:t>
-            </a:r>
-          </a:p>
-          <a:p>
-            <a:r>
-              <a:t>Prepared: 2025-02-02</a:t>
+            <p:ph type="title"/>
+          </p:nvPr>
+        </p:nvSpPr>
+        <p:spPr/>
+        <p:txBody>
+          <a:bodyPr/>
+          <a:lstStyle/>
+          <a:p>
+            <a:r>
+              <a:t>Ast Emp031 01 - EMP031</a:t>
+            </a:r>
+          </a:p>
+        </p:txBody>
+      </p:sp>
+      <p:sp>
+        <p:nvSpPr>
+          <p:cNvPr id="3" name="Content Placeholder 2"/>
+          <p:cNvSpPr>
+            <a:spLocks noGrp="1"/>
+          </p:cNvSpPr>
+          <p:nvPr>
+            <p:ph idx="1"/>
+          </p:nvPr>
+        </p:nvSpPr>
+        <p:spPr/>
+        <p:txBody>
+          <a:bodyPr/>
+          <a:lstStyle/>
+          <a:p>
+            <a:r>
+              <a:t>Slide 1: Executive Summary</a:t>
+            </a:r>
+          </a:p>
+          <a:p>
+            <a:pPr lvl="1"/>
+            <a:r>
+              <a:t>Section 1: Knowledge transfer and onboarding. EMP031 contributes to ast emp031 01 through recurring collaboration, clear ownership boundaries, and measurable outcomes. The team captures decisions, open issues, and handoffs so that knowledge remains discoverable for future programs.</a:t>
+            </a:r>
+          </a:p>
+          <a:p>
+            <a:pPr lvl="1"/>
+            <a:r>
+              <a:t>Section 2: Quarterly delivery milestones. EMP031 contributes to ast emp031 01 through recurring collaboration, clear ownership boundaries, and measurable outcomes. The team captures decisions, open issues, and handoffs so that knowledge remains discoverable for future programs.</a:t>
+            </a:r>
+          </a:p>
+          <a:p>
+            <a:pPr lvl="1"/>
+            <a:r>
+              <a:t>Section 3: Fabric semantic model planning. EMP031 contributes to ast emp031 01 through recurring collaboration, clear ownership boundaries, and measurable outcomes. The team captures decisions, open issues, and handoffs so that knowledge remains discoverable for future programs.</a:t>
             </a:r>
           </a:p>
         </p:txBody>
@@ -3172,7 +3186,7 @@
           <a:lstStyle/>
           <a:p>
             <a:r>
-              <a:t>Research Portfolio Status</a:t>
+              <a:t>Ast Emp031 01 - EMP031</a:t>
             </a:r>
           </a:p>
         </p:txBody>
@@ -3193,17 +3207,25 @@
           <a:lstStyle/>
           <a:p>
             <a:r>
-              <a:t>Overview of Research Portfolio Status for R&amp;D department.</a:t>
-            </a:r>
-          </a:p>
-          <a:p>
-            <a:r>
-              <a:t>Responsible: Alex Garcia (Director)</a:t>
-            </a:r>
-          </a:p>
-          <a:p>
-            <a:r>
-              <a:t>Location: Fremont | Skills: Python, Fabric, Azure AI, Synapse</a:t>
+              <a:t>Slide 2: Executive Summary</a:t>
+            </a:r>
+          </a:p>
+          <a:p>
+            <a:pPr lvl="1"/>
+            <a:r>
+              <a:t>Section 1: Department KPI performance. EMP031 contributes to ast emp031 01 through recurring collaboration, clear ownership boundaries, and measurable outcomes. The team captures decisions, open issues, and handoffs so that knowledge remains discoverable for future programs.</a:t>
+            </a:r>
+          </a:p>
+          <a:p>
+            <a:pPr lvl="1"/>
+            <a:r>
+              <a:t>Section 2: Knowledge transfer and onboarding. EMP031 contributes to ast emp031 01 through recurring collaboration, clear ownership boundaries, and measurable outcomes. The team captures decisions, open issues, and handoffs so that knowledge remains discoverable for future programs.</a:t>
+            </a:r>
+          </a:p>
+          <a:p>
+            <a:pPr lvl="1"/>
+            <a:r>
+              <a:t>Section 3: Department KPI performance. EMP031 contributes to ast emp031 01 through recurring collaboration, clear ownership boundaries, and measurable outcomes. The team captures decisions, open issues, and handoffs so that knowledge remains discoverable for future programs.</a:t>
             </a:r>
           </a:p>
         </p:txBody>
@@ -3242,7 +3264,7 @@
           <a:lstStyle/>
           <a:p>
             <a:r>
-              <a:t>IP Filing Pipeline</a:t>
+              <a:t>Ast Emp031 01 - EMP031</a:t>
             </a:r>
           </a:p>
         </p:txBody>
@@ -3263,17 +3285,25 @@
           <a:lstStyle/>
           <a:p>
             <a:r>
-              <a:t>Overview of IP Filing Pipeline for R&amp;D department.</a:t>
-            </a:r>
-          </a:p>
-          <a:p>
-            <a:r>
-              <a:t>Responsible: Alex Garcia (Director)</a:t>
-            </a:r>
-          </a:p>
-          <a:p>
-            <a:r>
-              <a:t>Location: Fremont | Skills: Python, Fabric, Azure AI, Synapse</a:t>
+              <a:t>Slide 3: Executive Summary</a:t>
+            </a:r>
+          </a:p>
+          <a:p>
+            <a:pPr lvl="1"/>
+            <a:r>
+              <a:t>Section 1: Data quality remediation. EMP031 contributes to ast emp031 01 through recurring collaboration, clear ownership boundaries, and measurable outcomes. The team captures decisions, open issues, and handoffs so that knowledge remains discoverable for future programs.</a:t>
+            </a:r>
+          </a:p>
+          <a:p>
+            <a:pPr lvl="1"/>
+            <a:r>
+              <a:t>Section 2: Data quality remediation. EMP031 contributes to ast emp031 01 through recurring collaboration, clear ownership boundaries, and measurable outcomes. The team captures decisions, open issues, and handoffs so that knowledge remains discoverable for future programs.</a:t>
+            </a:r>
+          </a:p>
+          <a:p>
+            <a:pPr lvl="1"/>
+            <a:r>
+              <a:t>Section 3: Fabric semantic model planning. EMP031 contributes to ast emp031 01 through recurring collaboration, clear ownership boundaries, and measurable outcomes. The team captures decisions, open issues, and handoffs so that knowledge remains discoverable for future programs.</a:t>
             </a:r>
           </a:p>
         </p:txBody>
@@ -3312,7 +3342,7 @@
           <a:lstStyle/>
           <a:p>
             <a:r>
-              <a:t>Technology Readiness Levels</a:t>
+              <a:t>Ast Emp031 01 - EMP031</a:t>
             </a:r>
           </a:p>
         </p:txBody>
@@ -3333,17 +3363,103 @@
           <a:lstStyle/>
           <a:p>
             <a:r>
-              <a:t>Overview of Technology Readiness Levels for R&amp;D department.</a:t>
-            </a:r>
-          </a:p>
-          <a:p>
-            <a:r>
-              <a:t>Responsible: Alex Garcia (Director)</a:t>
-            </a:r>
-          </a:p>
-          <a:p>
-            <a:r>
-              <a:t>Location: Fremont | Skills: Python, Fabric, Azure AI, Synapse</a:t>
+              <a:t>Slide 4: Executive Summary</a:t>
+            </a:r>
+          </a:p>
+          <a:p>
+            <a:pPr lvl="1"/>
+            <a:r>
+              <a:t>Section 1: Fabric semantic model planning. EMP031 contributes to ast emp031 01 through recurring collaboration, clear ownership boundaries, and measurable outcomes. The team captures decisions, open issues, and handoffs so that knowledge remains discoverable for future programs.</a:t>
+            </a:r>
+          </a:p>
+          <a:p>
+            <a:pPr lvl="1"/>
+            <a:r>
+              <a:t>Section 2: Knowledge transfer and onboarding. EMP031 contributes to ast emp031 01 through recurring collaboration, clear ownership boundaries, and measurable outcomes. The team captures decisions, open issues, and handoffs so that knowledge remains discoverable for future programs.</a:t>
+            </a:r>
+          </a:p>
+          <a:p>
+            <a:pPr lvl="1"/>
+            <a:r>
+              <a:t>Section 3: Automation backlog refinement. EMP031 contributes to ast emp031 01 through recurring collaboration, clear ownership boundaries, and measurable outcomes. The team captures decisions, open issues, and handoffs so that knowledge remains discoverable for future programs.</a:t>
+            </a:r>
+          </a:p>
+        </p:txBody>
+      </p:sp>
+    </p:spTree>
+  </p:cSld>
+  <p:clrMapOvr>
+    <a:masterClrMapping/>
+  </p:clrMapOvr>
+</p:sld>
+</file>
+
+<file path=ppt/slides/slide5.xml><?xml version="1.0" encoding="utf-8"?>
+<p:sld xmlns:a="http://schemas.openxmlformats.org/drawingml/2006/main" xmlns:p="http://schemas.openxmlformats.org/presentationml/2006/main" xmlns:r="http://schemas.openxmlformats.org/officeDocument/2006/relationships">
+  <p:cSld>
+    <p:spTree>
+      <p:nvGrpSpPr>
+        <p:cNvPr id="1" name=""/>
+        <p:cNvGrpSpPr/>
+        <p:nvPr/>
+      </p:nvGrpSpPr>
+      <p:grpSpPr/>
+      <p:sp>
+        <p:nvSpPr>
+          <p:cNvPr id="2" name="Title 1"/>
+          <p:cNvSpPr>
+            <a:spLocks noGrp="1"/>
+          </p:cNvSpPr>
+          <p:nvPr>
+            <p:ph type="title"/>
+          </p:nvPr>
+        </p:nvSpPr>
+        <p:spPr/>
+        <p:txBody>
+          <a:bodyPr/>
+          <a:lstStyle/>
+          <a:p>
+            <a:r>
+              <a:t>Ast Emp031 01 - EMP031</a:t>
+            </a:r>
+          </a:p>
+        </p:txBody>
+      </p:sp>
+      <p:sp>
+        <p:nvSpPr>
+          <p:cNvPr id="3" name="Content Placeholder 2"/>
+          <p:cNvSpPr>
+            <a:spLocks noGrp="1"/>
+          </p:cNvSpPr>
+          <p:nvPr>
+            <p:ph idx="1"/>
+          </p:nvPr>
+        </p:nvSpPr>
+        <p:spPr/>
+        <p:txBody>
+          <a:bodyPr/>
+          <a:lstStyle/>
+          <a:p>
+            <a:r>
+              <a:t>Slide 5: Executive Summary</a:t>
+            </a:r>
+          </a:p>
+          <a:p>
+            <a:pPr lvl="1"/>
+            <a:r>
+              <a:t>Section 1: Automation backlog refinement. EMP031 contributes to ast emp031 01 through recurring collaboration, clear ownership boundaries, and measurable outcomes. The team captures decisions, open issues, and handoffs so that knowledge remains discoverable for future programs.</a:t>
+            </a:r>
+          </a:p>
+          <a:p>
+            <a:pPr lvl="1"/>
+            <a:r>
+              <a:t>Section 2: Automation backlog refinement. EMP031 contributes to ast emp031 01 through recurring collaboration, clear ownership boundaries, and measurable outcomes. The team captures decisions, open issues, and handoffs so that knowledge remains discoverable for future programs.</a:t>
+            </a:r>
+          </a:p>
+          <a:p>
+            <a:pPr lvl="1"/>
+            <a:r>
+              <a:t>Section 3: Department KPI performance. EMP031 contributes to ast emp031 01 through recurring collaboration, clear ownership boundaries, and measurable outcomes. The team captures decisions, open issues, and handoffs so that knowledge remains discoverable for future programs.</a:t>
             </a:r>
           </a:p>
         </p:txBody>
